--- a/assignment/Relative_Interest_Pie_Chart_Marketing.pptx
+++ b/assignment/Relative_Interest_Pie_Chart_Marketing.pptx
@@ -128,7 +128,7 @@
                 <a:solidFill>
                   <a:srgbClr val="000000"/>
                 </a:solidFill>
-                <a:latin typeface="Arial"/>
+                <a:latin typeface="Calibri"/>
               </a:rPr>
               <a:t>Share of Total Interest</a:t>
             </a:r>
@@ -290,7 +290,7 @@
                   <a:solidFill>
                     <a:srgbClr val="000000"/>
                   </a:solidFill>
-                  <a:latin typeface="Arial"/>
+                  <a:latin typeface="Calibri"/>
                 </a:defRPr>
               </a:pPr>
             </a:p>
@@ -317,7 +317,7 @@
           <a:solidFill>
             <a:srgbClr val="000000"/>
           </a:solidFill>
-          <a:latin typeface="Arial"/>
+          <a:latin typeface="Calibri"/>
         </a:defRPr>
       </a:pPr>
       <a:endParaRPr lang="en-US"/>
@@ -3948,11 +3948,11 @@
           <a:p>
             <a:pPr algn="ctr"/>
             <a:r>
-              <a:rPr sz="4400" b="1">
+              <a:rPr sz="4800" b="1">
                 <a:solidFill>
                   <a:srgbClr val="1F3864"/>
                 </a:solidFill>
-                <a:latin typeface="Arial"/>
+                <a:latin typeface="Calibri"/>
               </a:rPr>
               <a:t>Relative Interest</a:t>
             </a:r>
@@ -3989,7 +3989,7 @@
                 <a:solidFill>
                   <a:srgbClr val="000000"/>
                 </a:solidFill>
-                <a:latin typeface="Arial"/>
+                <a:latin typeface="Calibri"/>
               </a:rPr>
               <a:t>Digital Skills Programmes on Google Trends</a:t>
             </a:r>
@@ -4005,7 +4005,7 @@
                 <a:solidFill>
                   <a:srgbClr val="000000"/>
                 </a:solidFill>
-                <a:latin typeface="Arial"/>
+                <a:latin typeface="Calibri"/>
               </a:rPr>
               <a:t>Market Research Lab, Task 1  ·  Nigeria, past 12 months</a:t>
             </a:r>
@@ -4137,7 +4137,7 @@
                 <a:solidFill>
                   <a:srgbClr val="1F3864"/>
                 </a:solidFill>
-                <a:latin typeface="Arial"/>
+                <a:latin typeface="Calibri"/>
               </a:rPr>
               <a:t>Relative-Interest Observations</a:t>
             </a:r>
@@ -4181,7 +4181,7 @@
                           <a:solidFill>
                             <a:srgbClr val="FFFFFF"/>
                           </a:solidFill>
-                          <a:latin typeface="Arial"/>
+                          <a:latin typeface="Calibri"/>
                         </a:rPr>
                         <a:t>Programme</a:t>
                       </a:r>
@@ -4240,7 +4240,7 @@
                           <a:solidFill>
                             <a:srgbClr val="FFFFFF"/>
                           </a:solidFill>
-                          <a:latin typeface="Arial"/>
+                          <a:latin typeface="Calibri"/>
                         </a:rPr>
                         <a:t>Average score</a:t>
                       </a:r>
@@ -4299,7 +4299,7 @@
                           <a:solidFill>
                             <a:srgbClr val="FFFFFF"/>
                           </a:solidFill>
-                          <a:latin typeface="Arial"/>
+                          <a:latin typeface="Calibri"/>
                         </a:rPr>
                         <a:t>Rank</a:t>
                       </a:r>
@@ -4360,7 +4360,7 @@
                           <a:solidFill>
                             <a:srgbClr val="000000"/>
                           </a:solidFill>
-                          <a:latin typeface="Arial"/>
+                          <a:latin typeface="Calibri"/>
                         </a:rPr>
                         <a:t>Cybersecurity</a:t>
                       </a:r>
@@ -4417,7 +4417,7 @@
                           <a:solidFill>
                             <a:srgbClr val="000000"/>
                           </a:solidFill>
-                          <a:latin typeface="Arial"/>
+                          <a:latin typeface="Calibri"/>
                         </a:rPr>
                         <a:t>43</a:t>
                       </a:r>
@@ -4474,7 +4474,7 @@
                           <a:solidFill>
                             <a:srgbClr val="000000"/>
                           </a:solidFill>
-                          <a:latin typeface="Arial"/>
+                          <a:latin typeface="Calibri"/>
                         </a:rPr>
                         <a:t>1</a:t>
                       </a:r>
@@ -4533,7 +4533,7 @@
                           <a:solidFill>
                             <a:srgbClr val="000000"/>
                           </a:solidFill>
-                          <a:latin typeface="Arial"/>
+                          <a:latin typeface="Calibri"/>
                         </a:rPr>
                         <a:t>Digital Marketing</a:t>
                       </a:r>
@@ -4592,7 +4592,7 @@
                           <a:solidFill>
                             <a:srgbClr val="000000"/>
                           </a:solidFill>
-                          <a:latin typeface="Arial"/>
+                          <a:latin typeface="Calibri"/>
                         </a:rPr>
                         <a:t>33</a:t>
                       </a:r>
@@ -4651,7 +4651,7 @@
                           <a:solidFill>
                             <a:srgbClr val="000000"/>
                           </a:solidFill>
-                          <a:latin typeface="Arial"/>
+                          <a:latin typeface="Calibri"/>
                         </a:rPr>
                         <a:t>2</a:t>
                       </a:r>
@@ -4712,7 +4712,7 @@
                           <a:solidFill>
                             <a:srgbClr val="000000"/>
                           </a:solidFill>
-                          <a:latin typeface="Arial"/>
+                          <a:latin typeface="Calibri"/>
                         </a:rPr>
                         <a:t>Data Analytics</a:t>
                       </a:r>
@@ -4769,7 +4769,7 @@
                           <a:solidFill>
                             <a:srgbClr val="000000"/>
                           </a:solidFill>
-                          <a:latin typeface="Arial"/>
+                          <a:latin typeface="Calibri"/>
                         </a:rPr>
                         <a:t>18</a:t>
                       </a:r>
@@ -4826,7 +4826,7 @@
                           <a:solidFill>
                             <a:srgbClr val="000000"/>
                           </a:solidFill>
-                          <a:latin typeface="Arial"/>
+                          <a:latin typeface="Calibri"/>
                         </a:rPr>
                         <a:t>3</a:t>
                       </a:r>
@@ -4885,7 +4885,7 @@
                           <a:solidFill>
                             <a:srgbClr val="000000"/>
                           </a:solidFill>
-                          <a:latin typeface="Arial"/>
+                          <a:latin typeface="Calibri"/>
                         </a:rPr>
                         <a:t>Generative AI &amp; Prompt Engineering</a:t>
                       </a:r>
@@ -4944,7 +4944,7 @@
                           <a:solidFill>
                             <a:srgbClr val="000000"/>
                           </a:solidFill>
-                          <a:latin typeface="Arial"/>
+                          <a:latin typeface="Calibri"/>
                         </a:rPr>
                         <a:t>13</a:t>
                       </a:r>
@@ -5003,7 +5003,7 @@
                           <a:solidFill>
                             <a:srgbClr val="000000"/>
                           </a:solidFill>
-                          <a:latin typeface="Arial"/>
+                          <a:latin typeface="Calibri"/>
                         </a:rPr>
                         <a:t>4</a:t>
                       </a:r>
@@ -5064,7 +5064,7 @@
                           <a:solidFill>
                             <a:srgbClr val="000000"/>
                           </a:solidFill>
-                          <a:latin typeface="Arial"/>
+                          <a:latin typeface="Calibri"/>
                         </a:rPr>
                         <a:t>Web Development</a:t>
                       </a:r>
@@ -5121,7 +5121,7 @@
                           <a:solidFill>
                             <a:srgbClr val="000000"/>
                           </a:solidFill>
-                          <a:latin typeface="Arial"/>
+                          <a:latin typeface="Calibri"/>
                         </a:rPr>
                         <a:t>13</a:t>
                       </a:r>
@@ -5178,7 +5178,7 @@
                           <a:solidFill>
                             <a:srgbClr val="000000"/>
                           </a:solidFill>
-                          <a:latin typeface="Arial"/>
+                          <a:latin typeface="Calibri"/>
                         </a:rPr>
                         <a:t>4</a:t>
                       </a:r>
@@ -5292,7 +5292,7 @@
                 <a:solidFill>
                   <a:srgbClr val="404040"/>
                 </a:solidFill>
-                <a:latin typeface="Arial"/>
+                <a:latin typeface="Calibri"/>
               </a:rPr>
               <a:t>The average Google Trends score of each programme</a:t>
             </a:r>
@@ -5327,7 +5327,7 @@
                 <a:solidFill>
                   <a:srgbClr val="404040"/>
                 </a:solidFill>
-                <a:latin typeface="Arial"/>
+                <a:latin typeface="Calibri"/>
               </a:rPr>
               <a:t>Google Trends gives each programme a score from 0 to 100, where 100 means the highest interest.</a:t>
             </a:r>
@@ -5424,7 +5424,7 @@
                 <a:solidFill>
                   <a:srgbClr val="1F3864"/>
                 </a:solidFill>
-                <a:latin typeface="Arial"/>
+                <a:latin typeface="Calibri"/>
               </a:rPr>
               <a:t>Relative Interest by Programme</a:t>
             </a:r>
@@ -5514,7 +5514,7 @@
                 <a:solidFill>
                   <a:srgbClr val="404040"/>
                 </a:solidFill>
-                <a:latin typeface="Arial"/>
+                <a:latin typeface="Calibri"/>
               </a:rPr>
               <a:t>Each programme's share of the total interest</a:t>
             </a:r>
@@ -5589,22 +5589,22 @@
           <a:lstStyle/>
           <a:p>
             <a:r>
-              <a:rPr sz="1500" b="1">
+              <a:rPr sz="1600" b="1">
                 <a:solidFill>
                   <a:srgbClr val="000000"/>
                 </a:solidFill>
-                <a:latin typeface="Arial"/>
+                <a:latin typeface="Calibri"/>
               </a:rPr>
               <a:t>Cybersecurity</a:t>
             </a:r>
           </a:p>
           <a:p>
             <a:r>
-              <a:rPr sz="1400" b="0">
+              <a:rPr sz="1500" b="0">
                 <a:solidFill>
                   <a:srgbClr val="000000"/>
                 </a:solidFill>
-                <a:latin typeface="Arial"/>
+                <a:latin typeface="Calibri"/>
               </a:rPr>
               <a:t>Score 43  ·  36%</a:t>
             </a:r>
@@ -5679,22 +5679,22 @@
           <a:lstStyle/>
           <a:p>
             <a:r>
-              <a:rPr sz="1500" b="1">
+              <a:rPr sz="1600" b="1">
                 <a:solidFill>
                   <a:srgbClr val="000000"/>
                 </a:solidFill>
-                <a:latin typeface="Arial"/>
+                <a:latin typeface="Calibri"/>
               </a:rPr>
               <a:t>Digital Marketing</a:t>
             </a:r>
           </a:p>
           <a:p>
             <a:r>
-              <a:rPr sz="1400" b="0">
+              <a:rPr sz="1500" b="0">
                 <a:solidFill>
                   <a:srgbClr val="000000"/>
                 </a:solidFill>
-                <a:latin typeface="Arial"/>
+                <a:latin typeface="Calibri"/>
               </a:rPr>
               <a:t>Score 33  ·  28%</a:t>
             </a:r>
@@ -5769,22 +5769,22 @@
           <a:lstStyle/>
           <a:p>
             <a:r>
-              <a:rPr sz="1500" b="1">
+              <a:rPr sz="1600" b="1">
                 <a:solidFill>
                   <a:srgbClr val="000000"/>
                 </a:solidFill>
-                <a:latin typeface="Arial"/>
+                <a:latin typeface="Calibri"/>
               </a:rPr>
               <a:t>Data Analytics</a:t>
             </a:r>
           </a:p>
           <a:p>
             <a:r>
-              <a:rPr sz="1400" b="0">
+              <a:rPr sz="1500" b="0">
                 <a:solidFill>
                   <a:srgbClr val="000000"/>
                 </a:solidFill>
-                <a:latin typeface="Arial"/>
+                <a:latin typeface="Calibri"/>
               </a:rPr>
               <a:t>Score 18  ·  15%</a:t>
             </a:r>
@@ -5859,22 +5859,22 @@
           <a:lstStyle/>
           <a:p>
             <a:r>
-              <a:rPr sz="1500" b="1">
+              <a:rPr sz="1600" b="1">
                 <a:solidFill>
                   <a:srgbClr val="000000"/>
                 </a:solidFill>
-                <a:latin typeface="Arial"/>
+                <a:latin typeface="Calibri"/>
               </a:rPr>
               <a:t>Generative AI &amp; Prompt Engineering</a:t>
             </a:r>
           </a:p>
           <a:p>
             <a:r>
-              <a:rPr sz="1400" b="0">
+              <a:rPr sz="1500" b="0">
                 <a:solidFill>
                   <a:srgbClr val="000000"/>
                 </a:solidFill>
-                <a:latin typeface="Arial"/>
+                <a:latin typeface="Calibri"/>
               </a:rPr>
               <a:t>Score 13  ·  11%</a:t>
             </a:r>
@@ -5949,22 +5949,22 @@
           <a:lstStyle/>
           <a:p>
             <a:r>
-              <a:rPr sz="1500" b="1">
+              <a:rPr sz="1600" b="1">
                 <a:solidFill>
                   <a:srgbClr val="000000"/>
                 </a:solidFill>
-                <a:latin typeface="Arial"/>
+                <a:latin typeface="Calibri"/>
               </a:rPr>
               <a:t>Web Development</a:t>
             </a:r>
           </a:p>
           <a:p>
             <a:r>
-              <a:rPr sz="1400" b="0">
+              <a:rPr sz="1500" b="0">
                 <a:solidFill>
                   <a:srgbClr val="000000"/>
                 </a:solidFill>
-                <a:latin typeface="Arial"/>
+                <a:latin typeface="Calibri"/>
               </a:rPr>
               <a:t>Score 13  ·  11%</a:t>
             </a:r>
@@ -5999,7 +5999,7 @@
                 <a:solidFill>
                   <a:srgbClr val="404040"/>
                 </a:solidFill>
-                <a:latin typeface="Arial"/>
+                <a:latin typeface="Calibri"/>
               </a:rPr>
               <a:t>Source: Google Trends, Nigeria, past 12 months (28 September 2025 to 28 September 2026).</a:t>
             </a:r>
@@ -6096,7 +6096,7 @@
                 <a:solidFill>
                   <a:srgbClr val="1F3864"/>
                 </a:solidFill>
-                <a:latin typeface="Arial"/>
+                <a:latin typeface="Calibri"/>
               </a:rPr>
               <a:t>Observations</a:t>
             </a:r>
@@ -6163,7 +6163,7 @@
           </a:xfrm>
         </p:spPr>
         <p:txBody>
-          <a:bodyPr/>
+          <a:bodyPr anchor="ctr"/>
           <a:lstStyle/>
           <a:p>
             <a:pPr>
@@ -6172,20 +6172,20 @@
               </a:spcAft>
             </a:pPr>
             <a:r>
-              <a:rPr sz="2200" b="1">
+              <a:rPr sz="2400" b="1">
                 <a:solidFill>
                   <a:srgbClr val="000000"/>
                 </a:solidFill>
-                <a:latin typeface="Arial"/>
+                <a:latin typeface="Calibri"/>
               </a:rPr>
               <a:t>Cybersecurity</a:t>
             </a:r>
             <a:r>
-              <a:rPr sz="2200" b="0">
+              <a:rPr sz="2400" b="0">
                 <a:solidFill>
                   <a:srgbClr val="000000"/>
                 </a:solidFill>
-                <a:latin typeface="Arial"/>
+                <a:latin typeface="Calibri"/>
               </a:rPr>
               <a:t> had the highest interest, with 36% of the total.</a:t>
             </a:r>
@@ -6197,20 +6197,20 @@
               </a:spcAft>
             </a:pPr>
             <a:r>
-              <a:rPr sz="2200" b="1">
+              <a:rPr sz="2400" b="1">
                 <a:solidFill>
                   <a:srgbClr val="000000"/>
                 </a:solidFill>
-                <a:latin typeface="Arial"/>
+                <a:latin typeface="Calibri"/>
               </a:rPr>
               <a:t>Digital Marketing</a:t>
             </a:r>
             <a:r>
-              <a:rPr sz="2200" b="0">
+              <a:rPr sz="2400" b="0">
                 <a:solidFill>
                   <a:srgbClr val="000000"/>
                 </a:solidFill>
-                <a:latin typeface="Arial"/>
+                <a:latin typeface="Calibri"/>
               </a:rPr>
               <a:t> came second with 28%.</a:t>
             </a:r>
@@ -6222,20 +6222,20 @@
               </a:spcAft>
             </a:pPr>
             <a:r>
-              <a:rPr sz="2200" b="1">
+              <a:rPr sz="2400" b="1">
                 <a:solidFill>
                   <a:srgbClr val="000000"/>
                 </a:solidFill>
-                <a:latin typeface="Arial"/>
+                <a:latin typeface="Calibri"/>
               </a:rPr>
               <a:t>Data Analytics</a:t>
             </a:r>
             <a:r>
-              <a:rPr sz="2200" b="0">
+              <a:rPr sz="2400" b="0">
                 <a:solidFill>
                   <a:srgbClr val="000000"/>
                 </a:solidFill>
-                <a:latin typeface="Arial"/>
+                <a:latin typeface="Calibri"/>
               </a:rPr>
               <a:t> came third with 15%.</a:t>
             </a:r>
@@ -6247,38 +6247,38 @@
               </a:spcAft>
             </a:pPr>
             <a:r>
-              <a:rPr sz="2200" b="1">
+              <a:rPr sz="2400" b="1">
                 <a:solidFill>
                   <a:srgbClr val="000000"/>
                 </a:solidFill>
-                <a:latin typeface="Arial"/>
+                <a:latin typeface="Calibri"/>
               </a:rPr>
               <a:t>Generative AI &amp; Prompt Engineering</a:t>
             </a:r>
             <a:r>
-              <a:rPr sz="2200" b="0">
+              <a:rPr sz="2400" b="0">
                 <a:solidFill>
                   <a:srgbClr val="000000"/>
                 </a:solidFill>
-                <a:latin typeface="Arial"/>
+                <a:latin typeface="Calibri"/>
               </a:rPr>
               <a:t> and </a:t>
             </a:r>
             <a:r>
-              <a:rPr sz="2200" b="1">
+              <a:rPr sz="2400" b="1">
                 <a:solidFill>
                   <a:srgbClr val="000000"/>
                 </a:solidFill>
-                <a:latin typeface="Arial"/>
+                <a:latin typeface="Calibri"/>
               </a:rPr>
               <a:t>Web Development</a:t>
             </a:r>
             <a:r>
-              <a:rPr sz="2200" b="0">
+              <a:rPr sz="2400" b="0">
                 <a:solidFill>
                   <a:srgbClr val="000000"/>
                 </a:solidFill>
-                <a:latin typeface="Arial"/>
+                <a:latin typeface="Calibri"/>
               </a:rPr>
               <a:t> had the lowest interest, with 11% each.</a:t>
             </a:r>
@@ -6290,11 +6290,11 @@
               </a:spcAft>
             </a:pPr>
             <a:r>
-              <a:rPr sz="2200" b="0">
+              <a:rPr sz="2400" b="0">
                 <a:solidFill>
                   <a:srgbClr val="000000"/>
                 </a:solidFill>
-                <a:latin typeface="Arial"/>
+                <a:latin typeface="Calibri"/>
               </a:rPr>
               <a:t>This means Cybersecurity and Digital Marketing should be promoted first.</a:t>
             </a:r>
@@ -6364,7 +6364,7 @@
                 <a:solidFill>
                   <a:srgbClr val="404040"/>
                 </a:solidFill>
-                <a:latin typeface="Arial"/>
+                <a:latin typeface="Calibri"/>
               </a:rPr>
               <a:t>What the pie chart shows</a:t>
             </a:r>
@@ -6457,11 +6457,11 @@
           <a:p>
             <a:pPr algn="ctr"/>
             <a:r>
-              <a:rPr sz="4400" b="1">
+              <a:rPr sz="4800" b="1">
                 <a:solidFill>
                   <a:srgbClr val="1F3864"/>
                 </a:solidFill>
-                <a:latin typeface="Arial"/>
+                <a:latin typeface="Calibri"/>
               </a:rPr>
               <a:t>Thank You</a:t>
             </a:r>
@@ -6498,7 +6498,7 @@
                 <a:solidFill>
                   <a:srgbClr val="000000"/>
                 </a:solidFill>
-                <a:latin typeface="Arial"/>
+                <a:latin typeface="Calibri"/>
               </a:rPr>
               <a:t>Any questions?</a:t>
             </a:r>
@@ -6514,7 +6514,7 @@
                 <a:solidFill>
                   <a:srgbClr val="000000"/>
                 </a:solidFill>
-                <a:latin typeface="Arial"/>
+                <a:latin typeface="Calibri"/>
               </a:rPr>
               <a:t>Market Research Lab, Task 1</a:t>
             </a:r>
@@ -6610,12 +6610,12 @@
     </a:clrScheme>
     <a:fontScheme name="Office">
       <a:majorFont>
-        <a:latin typeface="Arial"/>
+        <a:latin typeface="Calibri"/>
         <a:ea typeface=""/>
         <a:cs typeface=""/>
       </a:majorFont>
       <a:minorFont>
-        <a:latin typeface="Arial"/>
+        <a:latin typeface="Calibri"/>
         <a:ea typeface=""/>
         <a:cs typeface=""/>
       </a:minorFont>
@@ -6811,12 +6811,12 @@
     </a:clrScheme>
     <a:fontScheme name="Office">
       <a:majorFont>
-        <a:latin typeface="Arial"/>
+        <a:latin typeface="Calibri"/>
         <a:ea typeface=""/>
         <a:cs typeface=""/>
       </a:majorFont>
       <a:minorFont>
-        <a:latin typeface="Arial"/>
+        <a:latin typeface="Calibri"/>
         <a:ea typeface=""/>
         <a:cs typeface=""/>
       </a:minorFont>
